--- a/Quadro_Aulas_Report_2026-06-17.pptx
+++ b/Quadro_Aulas_Report_2026-06-17.pptx
@@ -1038,7 +1038,7 @@
                   <a:srgbClr val="8FA3C0"/>
                 </a:solidFill>
               </a:rPr>
-              <a:t>17 de Junho de 2026 as 08:41</a:t>
+              <a:t>17 de Junho de 2026 as 19:04</a:t>
             </a:r>
             <a:endParaRPr lang="en-US" sz="700" dirty="0"/>
           </a:p>
@@ -1135,7 +1135,7 @@
                   <a:srgbClr val="FFFFFF"/>
                 </a:solidFill>
               </a:rPr>
-              <a:t>389</a:t>
+              <a:t>390</a:t>
             </a:r>
             <a:endParaRPr lang="en-US" sz="2400" dirty="0"/>
           </a:p>
@@ -1279,7 +1279,7 @@
                   <a:srgbClr val="FCD34D"/>
                 </a:solidFill>
               </a:rPr>
-              <a:t>11</a:t>
+              <a:t>12</a:t>
             </a:r>
             <a:endParaRPr lang="en-US" sz="2400" dirty="0"/>
           </a:p>
@@ -1473,7 +1473,7 @@
                   <a:srgbClr val="8FA3C0"/>
                 </a:solidFill>
               </a:rPr>
-              <a:t>79% concluido  .  308 de 389 itens</a:t>
+              <a:t>79% concluido  .  308 de 390 itens</a:t>
             </a:r>
             <a:endParaRPr lang="en-US" sz="700" dirty="0"/>
           </a:p>
@@ -2299,7 +2299,7 @@
                   <a:srgbClr val="222222"/>
                 </a:solidFill>
               </a:rPr>
-              <a:t>Est: 428.5h . Real: 520.3h . Rem: 30.5h</a:t>
+              <a:t>Est: 428.5h . Real: 521.3h . Rem: 30.5h</a:t>
             </a:r>
             <a:endParaRPr lang="en-US" sz="750" dirty="0"/>
           </a:p>
@@ -2507,7 +2507,7 @@
                   <a:srgbClr val="DC2626"/>
                 </a:solidFill>
               </a:rPr>
-              <a:t>Projetado: 550.8h (+122.3h / +29%)</a:t>
+              <a:t>Projetado: 551.8h (+123.3h / +29%)</a:t>
             </a:r>
             <a:endParaRPr lang="en-US" sz="800" dirty="0"/>
           </a:p>
@@ -2640,7 +2640,7 @@
                   <a:srgbClr val="DC2626"/>
                 </a:solidFill>
               </a:rPr>
-              <a:t>+2h (+100%)</a:t>
+              <a:t>+3h (+150%)</a:t>
             </a:r>
             <a:endParaRPr lang="en-US" sz="700" dirty="0"/>
           </a:p>
@@ -3767,7 +3767,7 @@
                   <a:srgbClr val="D97706"/>
                 </a:solidFill>
               </a:rPr>
-              <a:t>1215.7h</a:t>
+              <a:t>1223.2h</a:t>
             </a:r>
             <a:endParaRPr lang="en-US" sz="2400" dirty="0"/>
           </a:p>
@@ -4033,7 +4033,7 @@
                   <a:srgbClr val="D97706"/>
                 </a:solidFill>
               </a:rPr>
-              <a:t>+121.2h</a:t>
+              <a:t>+128.7h</a:t>
             </a:r>
             <a:endParaRPr lang="en-US" sz="2400" dirty="0"/>
           </a:p>
@@ -4069,7 +4069,7 @@
                   <a:srgbClr val="888888"/>
                 </a:solidFill>
               </a:rPr>
-              <a:t>projetado: 1364.2h (+10%)</a:t>
+              <a:t>projetado: 1371.7h (+10%)</a:t>
             </a:r>
             <a:endParaRPr lang="en-US" sz="700" dirty="0"/>
           </a:p>
@@ -4084,7 +4084,7 @@
         <p:spPr>
           <a:xfrm>
             <a:off x="2441448" y="2916936"/>
-            <a:ext cx="8596804" cy="54864"/>
+            <a:ext cx="8602546" cy="54864"/>
           </a:xfrm>
           <a:prstGeom prst="rect">
             <a:avLst/>
@@ -4108,8 +4108,8 @@
         </p:nvSpPr>
         <p:spPr>
           <a:xfrm>
-            <a:off x="11038252" y="2916936"/>
-            <a:ext cx="1050116" cy="54864"/>
+            <a:off x="11043994" y="2916936"/>
+            <a:ext cx="1044374" cy="54864"/>
           </a:xfrm>
           <a:prstGeom prst="rect">
             <a:avLst/>
@@ -5853,7 +5853,7 @@
                   <a:srgbClr val="222222"/>
                 </a:solidFill>
               </a:rPr>
-              <a:t>#404988 +2h(+100%) [gabrielpigatto frwk.com.br]</a:t>
+              <a:t>#404988 +3h(+150%) [gabrielpigatto frwk.com.br]</a:t>
             </a:r>
             <a:endParaRPr lang="en-US" sz="750" dirty="0"/>
           </a:p>
@@ -6440,7 +6440,7 @@
                   <a:srgbClr val="FFFFFF"/>
                 </a:solidFill>
               </a:rPr>
-              <a:t>126</a:t>
+              <a:t>127</a:t>
             </a:r>
             <a:endParaRPr lang="en-US" sz="650" dirty="0"/>
           </a:p>
@@ -6490,7 +6490,7 @@
                   <a:srgbClr val="222222"/>
                 </a:solidFill>
               </a:rPr>
-              <a:t>126 itens criados pos 01/05</a:t>
+              <a:t>127 itens criados pos 01/05</a:t>
             </a:r>
             <a:endParaRPr lang="en-US" sz="750" dirty="0"/>
           </a:p>
@@ -6817,7 +6817,7 @@
         <p:spPr>
           <a:xfrm>
             <a:off x="2496312" y="6153912"/>
-            <a:ext cx="953300" cy="73152"/>
+            <a:ext cx="989193" cy="73152"/>
           </a:xfrm>
           <a:prstGeom prst="rect">
             <a:avLst/>
@@ -6863,7 +6863,7 @@
                   <a:srgbClr val="1D9E75"/>
                 </a:solidFill>
               </a:rPr>
-              <a:t>199.2h · 40 subs finalizadas</a:t>
+              <a:t>206.7h · 40 subs finalizadas</a:t>
             </a:r>
             <a:endParaRPr lang="en-US" sz="950" dirty="0"/>
           </a:p>

--- a/Quadro_Aulas_Report_2026-06-17.pptx
+++ b/Quadro_Aulas_Report_2026-06-17.pptx
@@ -1038,7 +1038,7 @@
                   <a:srgbClr val="8FA3C0"/>
                 </a:solidFill>
               </a:rPr>
-              <a:t>17 de Junho de 2026 as 19:04</a:t>
+              <a:t>17 de Junho de 2026 as 19:51</a:t>
             </a:r>
             <a:endParaRPr lang="en-US" sz="700" dirty="0"/>
           </a:p>
@@ -1135,7 +1135,7 @@
                   <a:srgbClr val="FFFFFF"/>
                 </a:solidFill>
               </a:rPr>
-              <a:t>390</a:t>
+              <a:t>393</a:t>
             </a:r>
             <a:endParaRPr lang="en-US" sz="2400" dirty="0"/>
           </a:p>
@@ -1207,7 +1207,7 @@
                   <a:srgbClr val="4ADE80"/>
                 </a:solidFill>
               </a:rPr>
-              <a:t>308</a:t>
+              <a:t>314</a:t>
             </a:r>
             <a:endParaRPr lang="en-US" sz="2400" dirty="0"/>
           </a:p>
@@ -1279,7 +1279,7 @@
                   <a:srgbClr val="FCD34D"/>
                 </a:solidFill>
               </a:rPr>
-              <a:t>12</a:t>
+              <a:t>9</a:t>
             </a:r>
             <a:endParaRPr lang="en-US" sz="2400" dirty="0"/>
           </a:p>
@@ -1427,7 +1427,7 @@
         <p:spPr>
           <a:xfrm>
             <a:off x="137160" y="3538728"/>
-            <a:ext cx="1625346" cy="91440"/>
+            <a:ext cx="1645920" cy="91440"/>
           </a:xfrm>
           <a:prstGeom prst="rect">
             <a:avLst/>
@@ -1473,7 +1473,7 @@
                   <a:srgbClr val="8FA3C0"/>
                 </a:solidFill>
               </a:rPr>
-              <a:t>79% concluido  .  308 de 390 itens</a:t>
+              <a:t>80% concluido  .  314 de 393 itens</a:t>
             </a:r>
             <a:endParaRPr lang="en-US" sz="700" dirty="0"/>
           </a:p>
@@ -1854,7 +1854,7 @@
                   <a:srgbClr val="222222"/>
                 </a:solidFill>
               </a:rPr>
-              <a:t>A Fazer: 4 . Em progresso: 0 . Finalizados: 65</a:t>
+              <a:t>A Fazer: 2 . Em progresso: 0 . Finalizados: 67</a:t>
             </a:r>
             <a:endParaRPr lang="en-US" sz="750" dirty="0"/>
           </a:p>
@@ -1890,7 +1890,7 @@
                   <a:srgbClr val="222222"/>
                 </a:solidFill>
               </a:rPr>
-              <a:t>Est: 274h . Real: 263.7h . Rem: 7h</a:t>
+              <a:t>Est: 274h . Real: 264.8h . Rem: 5h</a:t>
             </a:r>
             <a:endParaRPr lang="en-US" sz="750" dirty="0"/>
           </a:p>
@@ -2016,7 +2016,7 @@
         <p:spPr>
           <a:xfrm>
             <a:off x="2514600" y="1033272"/>
-            <a:ext cx="2071482" cy="50292"/>
+            <a:ext cx="2137593" cy="50292"/>
           </a:xfrm>
           <a:prstGeom prst="rect">
             <a:avLst/>
@@ -2062,7 +2062,7 @@
                   <a:srgbClr val="888888"/>
                 </a:solidFill>
               </a:rPr>
-              <a:t>Subs: 94% · 65 de 69</a:t>
+              <a:t>Subs: 97% · 67 de 69</a:t>
             </a:r>
             <a:endParaRPr lang="en-US" sz="650" dirty="0"/>
           </a:p>
@@ -2098,7 +2098,7 @@
                   <a:srgbClr val="1D9E75"/>
                 </a:solidFill>
               </a:rPr>
-              <a:t>Projetado: 270.7h (-3.3h / -1%)</a:t>
+              <a:t>Projetado: 269.8h (-4.2h / -2%)</a:t>
             </a:r>
             <a:endParaRPr lang="en-US" sz="800" dirty="0"/>
           </a:p>
@@ -3250,7 +3250,7 @@
                   <a:srgbClr val="222222"/>
                 </a:solidFill>
               </a:rPr>
-              <a:t>A Fazer: 27 . Em progresso: 5 . Finalizados: 87</a:t>
+              <a:t>A Fazer: 27 . Em progresso: 5 . Finalizados: 88</a:t>
             </a:r>
             <a:endParaRPr lang="en-US" sz="750" dirty="0"/>
           </a:p>
@@ -3286,7 +3286,7 @@
                   <a:srgbClr val="222222"/>
                 </a:solidFill>
               </a:rPr>
-              <a:t>Est: 497.5h . Real: 255.3h . Rem: 111h</a:t>
+              <a:t>Est: 497.5h . Real: 255.8h . Rem: 111h</a:t>
             </a:r>
             <a:endParaRPr lang="en-US" sz="750" dirty="0"/>
           </a:p>
@@ -3458,7 +3458,7 @@
                   <a:srgbClr val="888888"/>
                 </a:solidFill>
               </a:rPr>
-              <a:t>Subs: 73% · 87 de 120</a:t>
+              <a:t>Subs: 73% · 88 de 120</a:t>
             </a:r>
             <a:endParaRPr lang="en-US" sz="650" dirty="0"/>
           </a:p>
@@ -3494,7 +3494,7 @@
                   <a:srgbClr val="1D9E75"/>
                 </a:solidFill>
               </a:rPr>
-              <a:t>Projetado: 366.3h (-131.2h / -26%)</a:t>
+              <a:t>Projetado: 366.8h (-130.7h / -26%)</a:t>
             </a:r>
             <a:endParaRPr lang="en-US" sz="800" dirty="0"/>
           </a:p>
@@ -3634,7 +3634,7 @@
                   <a:srgbClr val="222222"/>
                 </a:solidFill>
               </a:rPr>
-              <a:t>1243h</a:t>
+              <a:t>1244h</a:t>
             </a:r>
             <a:endParaRPr lang="en-US" sz="2400" dirty="0"/>
           </a:p>
@@ -3767,7 +3767,7 @@
                   <a:srgbClr val="D97706"/>
                 </a:solidFill>
               </a:rPr>
-              <a:t>1223.2h</a:t>
+              <a:t>1239.9h</a:t>
             </a:r>
             <a:endParaRPr lang="en-US" sz="2400" dirty="0"/>
           </a:p>
@@ -3900,7 +3900,7 @@
                   <a:srgbClr val="F87171"/>
                 </a:solidFill>
               </a:rPr>
-              <a:t>148.5h</a:t>
+              <a:t>146.5h</a:t>
             </a:r>
             <a:endParaRPr lang="en-US" sz="2400" dirty="0"/>
           </a:p>
@@ -4033,7 +4033,7 @@
                   <a:srgbClr val="D97706"/>
                 </a:solidFill>
               </a:rPr>
-              <a:t>+128.7h</a:t>
+              <a:t>+142.4h</a:t>
             </a:r>
             <a:endParaRPr lang="en-US" sz="2400" dirty="0"/>
           </a:p>
@@ -4069,7 +4069,7 @@
                   <a:srgbClr val="888888"/>
                 </a:solidFill>
               </a:rPr>
-              <a:t>projetado: 1371.7h (+10%)</a:t>
+              <a:t>projetado: 1386.4h (+11%)</a:t>
             </a:r>
             <a:endParaRPr lang="en-US" sz="700" dirty="0"/>
           </a:p>
@@ -4084,7 +4084,7 @@
         <p:spPr>
           <a:xfrm>
             <a:off x="2441448" y="2916936"/>
-            <a:ext cx="8602546" cy="54864"/>
+            <a:ext cx="8627536" cy="54864"/>
           </a:xfrm>
           <a:prstGeom prst="rect">
             <a:avLst/>
@@ -4108,8 +4108,8 @@
         </p:nvSpPr>
         <p:spPr>
           <a:xfrm>
-            <a:off x="11043994" y="2916936"/>
-            <a:ext cx="1044374" cy="54864"/>
+            <a:off x="11068984" y="2916936"/>
+            <a:ext cx="1019384" cy="54864"/>
           </a:xfrm>
           <a:prstGeom prst="rect">
             <a:avLst/>
@@ -4250,7 +4250,7 @@
                   <a:srgbClr val="0F6E56"/>
                 </a:solidFill>
               </a:rPr>
-              <a:t>88% concluido</a:t>
+              <a:t>90% concluido</a:t>
             </a:r>
             <a:endParaRPr lang="en-US" sz="650" dirty="0"/>
           </a:p>
@@ -4290,7 +4290,7 @@
         <p:spPr>
           <a:xfrm>
             <a:off x="2551176" y="3291840"/>
-            <a:ext cx="4011290" cy="64008"/>
+            <a:ext cx="4102456" cy="64008"/>
           </a:xfrm>
           <a:prstGeom prst="rect">
             <a:avLst/>
@@ -4397,7 +4397,7 @@
                   <a:srgbClr val="1D9E75"/>
                 </a:solidFill>
               </a:rPr>
-              <a:t>19/06/2026</a:t>
+              <a:t>18/06/2026</a:t>
             </a:r>
             <a:endParaRPr lang="en-US" sz="1050" dirty="0"/>
           </a:p>
@@ -5167,7 +5167,7 @@
                   <a:srgbClr val="D85A30"/>
                 </a:solidFill>
               </a:rPr>
-              <a:t>17.6%</a:t>
+              <a:t>17.3%</a:t>
             </a:r>
             <a:endParaRPr lang="en-US" sz="2200" dirty="0"/>
           </a:p>
@@ -5300,7 +5300,7 @@
                   <a:srgbClr val="534AB7"/>
                 </a:solidFill>
               </a:rPr>
-              <a:t>11.7%</a:t>
+              <a:t>11.6%</a:t>
             </a:r>
             <a:endParaRPr lang="en-US" sz="2200" dirty="0"/>
           </a:p>
@@ -5372,7 +5372,7 @@
                   <a:srgbClr val="888888"/>
                 </a:solidFill>
               </a:rPr>
-              <a:t>26 Sub Bug (ADO) · 126.8h</a:t>
+              <a:t>26 Sub Bug (ADO) · 136.8h</a:t>
             </a:r>
             <a:endParaRPr lang="en-US" sz="700" dirty="0"/>
           </a:p>
@@ -5430,10 +5430,10 @@
             <a:r>
               <a:rPr lang="en-US" sz="2200" b="1" dirty="0">
                 <a:solidFill>
-                  <a:srgbClr val="D97706"/>
-                </a:solidFill>
-              </a:rPr>
-              <a:t>24</a:t>
+                  <a:srgbClr val="DC2626"/>
+                </a:solidFill>
+              </a:rPr>
+              <a:t>34</a:t>
             </a:r>
             <a:endParaRPr lang="en-US" sz="2200" dirty="0"/>
           </a:p>
@@ -5505,7 +5505,7 @@
                   <a:srgbClr val="888888"/>
                 </a:solidFill>
               </a:rPr>
-              <a:t>fixes sem card no Git · 54% do time com card</a:t>
+              <a:t>fixes sem card no Git · 45% do time com card</a:t>
             </a:r>
             <a:endParaRPr lang="en-US" sz="700" dirty="0"/>
           </a:p>
@@ -5566,7 +5566,7 @@
                   <a:srgbClr val="1D9E75"/>
                 </a:solidFill>
               </a:rPr>
-              <a:t>82.4%</a:t>
+              <a:t>82.7%</a:t>
             </a:r>
             <a:endParaRPr lang="en-US" sz="2200" dirty="0"/>
           </a:p>
@@ -6440,7 +6440,7 @@
                   <a:srgbClr val="FFFFFF"/>
                 </a:solidFill>
               </a:rPr>
-              <a:t>127</a:t>
+              <a:t>130</a:t>
             </a:r>
             <a:endParaRPr lang="en-US" sz="650" dirty="0"/>
           </a:p>
@@ -6490,7 +6490,7 @@
                   <a:srgbClr val="222222"/>
                 </a:solidFill>
               </a:rPr>
-              <a:t>127 itens criados pos 01/05</a:t>
+              <a:t>130 itens criados pos 01/05</a:t>
             </a:r>
             <a:endParaRPr lang="en-US" sz="750" dirty="0"/>
           </a:p>
@@ -6734,7 +6734,7 @@
           </a:solidFill>
           <a:ln w="12700">
             <a:solidFill>
-              <a:srgbClr val="DDDDDD"/>
+              <a:srgbClr val="FCA5A5"/>
             </a:solidFill>
             <a:prstDash val="solid"/>
           </a:ln>
@@ -6817,7 +6817,7 @@
         <p:spPr>
           <a:xfrm>
             <a:off x="2496312" y="6153912"/>
-            <a:ext cx="989193" cy="73152"/>
+            <a:ext cx="1010728" cy="73152"/>
           </a:xfrm>
           <a:prstGeom prst="rect">
             <a:avLst/>
@@ -6863,7 +6863,7 @@
                   <a:srgbClr val="1D9E75"/>
                 </a:solidFill>
               </a:rPr>
-              <a:t>206.7h · 40 subs finalizadas</a:t>
+              <a:t>211.2h · 41 subs finalizadas</a:t>
             </a:r>
             <a:endParaRPr lang="en-US" sz="950" dirty="0"/>
           </a:p>
@@ -6908,6 +6908,67 @@
       <p:sp>
         <p:nvSpPr>
           <p:cNvPr id="186" name="Shape 184"/>
+          <p:cNvSpPr/>
+          <p:nvPr/>
+        </p:nvSpPr>
+        <p:spPr>
+          <a:xfrm>
+            <a:off x="2496312" y="6647688"/>
+            <a:ext cx="1024128" cy="201168"/>
+          </a:xfrm>
+          <a:prstGeom prst="rect">
+            <a:avLst/>
+          </a:prstGeom>
+          <a:solidFill>
+            <a:srgbClr val="FEE2E2"/>
+          </a:solidFill>
+          <a:ln w="12700">
+            <a:solidFill>
+              <a:srgbClr val="FCA5A5"/>
+            </a:solidFill>
+            <a:prstDash val="solid"/>
+          </a:ln>
+        </p:spPr>
+      </p:sp>
+      <p:sp>
+        <p:nvSpPr>
+          <p:cNvPr id="187" name="Text 185"/>
+          <p:cNvSpPr/>
+          <p:nvPr/>
+        </p:nvSpPr>
+        <p:spPr>
+          <a:xfrm>
+            <a:off x="2496312" y="6647688"/>
+            <a:ext cx="1024128" cy="201168"/>
+          </a:xfrm>
+          <a:prstGeom prst="rect">
+            <a:avLst/>
+          </a:prstGeom>
+          <a:noFill/>
+          <a:ln/>
+        </p:spPr>
+        <p:txBody>
+          <a:bodyPr wrap="square" lIns="0" tIns="0" rIns="0" bIns="0" rtlCol="0" anchor="ctr"/>
+          <a:lstStyle/>
+          <a:p>
+            <a:pPr algn="ctr" indent="0" marL="0">
+              <a:buNone/>
+            </a:pPr>
+            <a:r>
+              <a:rPr lang="en-US" sz="750" b="1" dirty="0">
+                <a:solidFill>
+                  <a:srgbClr val="DC2626"/>
+                </a:solidFill>
+              </a:rPr>
+              <a:t>⚠ 1 fix(s) sem card</a:t>
+            </a:r>
+            <a:endParaRPr lang="en-US" sz="750" dirty="0"/>
+          </a:p>
+        </p:txBody>
+      </p:sp>
+      <p:sp>
+        <p:nvSpPr>
+          <p:cNvPr id="188" name="Shape 186"/>
           <p:cNvSpPr/>
           <p:nvPr/>
         </p:nvSpPr>
@@ -6939,7 +7000,7 @@
       </p:sp>
       <p:sp>
         <p:nvSpPr>
-          <p:cNvPr id="187" name="Text 185"/>
+          <p:cNvPr id="189" name="Text 187"/>
           <p:cNvSpPr/>
           <p:nvPr/>
         </p:nvSpPr>
@@ -6975,7 +7036,7 @@
       </p:sp>
       <p:sp>
         <p:nvSpPr>
-          <p:cNvPr id="188" name="Shape 186"/>
+          <p:cNvPr id="190" name="Shape 188"/>
           <p:cNvSpPr/>
           <p:nvPr/>
         </p:nvSpPr>
@@ -7000,7 +7061,7 @@
       </p:sp>
       <p:sp>
         <p:nvSpPr>
-          <p:cNvPr id="189" name="Shape 187"/>
+          <p:cNvPr id="191" name="Shape 189"/>
           <p:cNvSpPr/>
           <p:nvPr/>
         </p:nvSpPr>
@@ -7025,7 +7086,7 @@
       </p:sp>
       <p:sp>
         <p:nvSpPr>
-          <p:cNvPr id="190" name="Text 188"/>
+          <p:cNvPr id="192" name="Text 190"/>
           <p:cNvSpPr/>
           <p:nvPr/>
         </p:nvSpPr>
@@ -7053,7 +7114,7 @@
                   <a:srgbClr val="D85A30"/>
                 </a:solidFill>
               </a:rPr>
-              <a:t>304.5h · 46 subs finalizadas</a:t>
+              <a:t>314.5h · 47 subs finalizadas</a:t>
             </a:r>
             <a:endParaRPr lang="en-US" sz="950" dirty="0"/>
           </a:p>
@@ -7061,7 +7122,7 @@
       </p:sp>
       <p:sp>
         <p:nvSpPr>
-          <p:cNvPr id="191" name="Text 189"/>
+          <p:cNvPr id="193" name="Text 191"/>
           <p:cNvSpPr/>
           <p:nvPr/>
         </p:nvSpPr>
@@ -7097,7 +7158,7 @@
       </p:sp>
       <p:sp>
         <p:nvSpPr>
-          <p:cNvPr id="192" name="Shape 190"/>
+          <p:cNvPr id="194" name="Shape 192"/>
           <p:cNvSpPr/>
           <p:nvPr/>
         </p:nvSpPr>
@@ -7122,7 +7183,7 @@
       </p:sp>
       <p:sp>
         <p:nvSpPr>
-          <p:cNvPr id="193" name="Text 191"/>
+          <p:cNvPr id="195" name="Text 193"/>
           <p:cNvSpPr/>
           <p:nvPr/>
         </p:nvSpPr>
@@ -7158,7 +7219,7 @@
       </p:sp>
       <p:sp>
         <p:nvSpPr>
-          <p:cNvPr id="194" name="Shape 192"/>
+          <p:cNvPr id="196" name="Shape 194"/>
           <p:cNvSpPr/>
           <p:nvPr/>
         </p:nvSpPr>
@@ -7190,7 +7251,7 @@
       </p:sp>
       <p:sp>
         <p:nvSpPr>
-          <p:cNvPr id="195" name="Text 193"/>
+          <p:cNvPr id="197" name="Text 195"/>
           <p:cNvSpPr/>
           <p:nvPr/>
         </p:nvSpPr>
@@ -7226,7 +7287,7 @@
       </p:sp>
       <p:sp>
         <p:nvSpPr>
-          <p:cNvPr id="196" name="Shape 194"/>
+          <p:cNvPr id="198" name="Shape 196"/>
           <p:cNvSpPr/>
           <p:nvPr/>
         </p:nvSpPr>
@@ -7251,7 +7312,7 @@
       </p:sp>
       <p:sp>
         <p:nvSpPr>
-          <p:cNvPr id="197" name="Shape 195"/>
+          <p:cNvPr id="199" name="Shape 197"/>
           <p:cNvSpPr/>
           <p:nvPr/>
         </p:nvSpPr>
@@ -7276,7 +7337,7 @@
       </p:sp>
       <p:sp>
         <p:nvSpPr>
-          <p:cNvPr id="198" name="Text 196"/>
+          <p:cNvPr id="200" name="Text 198"/>
           <p:cNvSpPr/>
           <p:nvPr/>
         </p:nvSpPr>
@@ -7312,7 +7373,7 @@
       </p:sp>
       <p:sp>
         <p:nvSpPr>
-          <p:cNvPr id="199" name="Text 197"/>
+          <p:cNvPr id="201" name="Text 199"/>
           <p:cNvSpPr/>
           <p:nvPr/>
         </p:nvSpPr>
@@ -7348,7 +7409,7 @@
       </p:sp>
       <p:sp>
         <p:nvSpPr>
-          <p:cNvPr id="200" name="Shape 198"/>
+          <p:cNvPr id="202" name="Shape 200"/>
           <p:cNvSpPr/>
           <p:nvPr/>
         </p:nvSpPr>
@@ -7373,7 +7434,7 @@
       </p:sp>
       <p:sp>
         <p:nvSpPr>
-          <p:cNvPr id="201" name="Text 199"/>
+          <p:cNvPr id="203" name="Text 201"/>
           <p:cNvSpPr/>
           <p:nvPr/>
         </p:nvSpPr>
@@ -7409,7 +7470,7 @@
       </p:sp>
       <p:sp>
         <p:nvSpPr>
-          <p:cNvPr id="202" name="Shape 200"/>
+          <p:cNvPr id="204" name="Shape 202"/>
           <p:cNvSpPr/>
           <p:nvPr/>
         </p:nvSpPr>
@@ -7441,7 +7502,7 @@
       </p:sp>
       <p:sp>
         <p:nvSpPr>
-          <p:cNvPr id="203" name="Text 201"/>
+          <p:cNvPr id="205" name="Text 203"/>
           <p:cNvSpPr/>
           <p:nvPr/>
         </p:nvSpPr>
@@ -7477,7 +7538,7 @@
       </p:sp>
       <p:sp>
         <p:nvSpPr>
-          <p:cNvPr id="204" name="Shape 202"/>
+          <p:cNvPr id="206" name="Shape 204"/>
           <p:cNvSpPr/>
           <p:nvPr/>
         </p:nvSpPr>
@@ -7502,7 +7563,7 @@
       </p:sp>
       <p:sp>
         <p:nvSpPr>
-          <p:cNvPr id="205" name="Shape 203"/>
+          <p:cNvPr id="207" name="Shape 205"/>
           <p:cNvSpPr/>
           <p:nvPr/>
         </p:nvSpPr>
@@ -7527,7 +7588,7 @@
       </p:sp>
       <p:sp>
         <p:nvSpPr>
-          <p:cNvPr id="206" name="Text 204"/>
+          <p:cNvPr id="208" name="Text 206"/>
           <p:cNvSpPr/>
           <p:nvPr/>
         </p:nvSpPr>
@@ -7563,7 +7624,7 @@
       </p:sp>
       <p:sp>
         <p:nvSpPr>
-          <p:cNvPr id="207" name="Text 205"/>
+          <p:cNvPr id="209" name="Text 207"/>
           <p:cNvSpPr/>
           <p:nvPr/>
         </p:nvSpPr>
@@ -7599,7 +7660,7 @@
       </p:sp>
       <p:sp>
         <p:nvSpPr>
-          <p:cNvPr id="208" name="Shape 206"/>
+          <p:cNvPr id="210" name="Shape 208"/>
           <p:cNvSpPr/>
           <p:nvPr/>
         </p:nvSpPr>
@@ -7631,7 +7692,7 @@
       </p:sp>
       <p:sp>
         <p:nvSpPr>
-          <p:cNvPr id="209" name="Text 207"/>
+          <p:cNvPr id="211" name="Text 209"/>
           <p:cNvSpPr/>
           <p:nvPr/>
         </p:nvSpPr>
@@ -7667,7 +7728,7 @@
       </p:sp>
       <p:sp>
         <p:nvSpPr>
-          <p:cNvPr id="210" name="Shape 208"/>
+          <p:cNvPr id="212" name="Shape 210"/>
           <p:cNvSpPr/>
           <p:nvPr/>
         </p:nvSpPr>
@@ -7692,7 +7753,7 @@
       </p:sp>
       <p:sp>
         <p:nvSpPr>
-          <p:cNvPr id="211" name="Shape 209"/>
+          <p:cNvPr id="213" name="Shape 211"/>
           <p:cNvSpPr/>
           <p:nvPr/>
         </p:nvSpPr>
@@ -7717,7 +7778,7 @@
       </p:sp>
       <p:sp>
         <p:nvSpPr>
-          <p:cNvPr id="212" name="Text 210"/>
+          <p:cNvPr id="214" name="Text 212"/>
           <p:cNvSpPr/>
           <p:nvPr/>
         </p:nvSpPr>
@@ -7753,7 +7814,7 @@
       </p:sp>
       <p:sp>
         <p:nvSpPr>
-          <p:cNvPr id="213" name="Text 211"/>
+          <p:cNvPr id="215" name="Text 213"/>
           <p:cNvSpPr/>
           <p:nvPr/>
         </p:nvSpPr>
@@ -7789,7 +7850,7 @@
       </p:sp>
       <p:sp>
         <p:nvSpPr>
-          <p:cNvPr id="214" name="Shape 212"/>
+          <p:cNvPr id="216" name="Shape 214"/>
           <p:cNvSpPr/>
           <p:nvPr/>
         </p:nvSpPr>
@@ -7814,7 +7875,7 @@
       </p:sp>
       <p:sp>
         <p:nvSpPr>
-          <p:cNvPr id="215" name="Text 213"/>
+          <p:cNvPr id="217" name="Text 215"/>
           <p:cNvSpPr/>
           <p:nvPr/>
         </p:nvSpPr>
@@ -7842,7 +7903,7 @@
                   <a:srgbClr val="DC2626"/>
                 </a:solidFill>
               </a:rPr>
-              <a:t>⚠ 10 fix(s) sem card</a:t>
+              <a:t>⚠ 19 fix(s) sem card</a:t>
             </a:r>
             <a:endParaRPr lang="en-US" sz="750" dirty="0"/>
           </a:p>
@@ -7850,7 +7911,7 @@
       </p:sp>
       <p:sp>
         <p:nvSpPr>
-          <p:cNvPr id="216" name="Shape 214"/>
+          <p:cNvPr id="218" name="Shape 216"/>
           <p:cNvSpPr/>
           <p:nvPr/>
         </p:nvSpPr>
@@ -7882,7 +7943,7 @@
       </p:sp>
       <p:sp>
         <p:nvSpPr>
-          <p:cNvPr id="217" name="Text 215"/>
+          <p:cNvPr id="219" name="Text 217"/>
           <p:cNvSpPr/>
           <p:nvPr/>
         </p:nvSpPr>
@@ -7918,7 +7979,7 @@
       </p:sp>
       <p:sp>
         <p:nvSpPr>
-          <p:cNvPr id="218" name="Shape 216"/>
+          <p:cNvPr id="220" name="Shape 218"/>
           <p:cNvSpPr/>
           <p:nvPr/>
         </p:nvSpPr>
@@ -7943,7 +8004,7 @@
       </p:sp>
       <p:sp>
         <p:nvSpPr>
-          <p:cNvPr id="219" name="Shape 217"/>
+          <p:cNvPr id="221" name="Shape 219"/>
           <p:cNvSpPr/>
           <p:nvPr/>
         </p:nvSpPr>
@@ -7968,7 +8029,7 @@
       </p:sp>
       <p:sp>
         <p:nvSpPr>
-          <p:cNvPr id="220" name="Text 218"/>
+          <p:cNvPr id="222" name="Text 220"/>
           <p:cNvSpPr/>
           <p:nvPr/>
         </p:nvSpPr>
@@ -8004,7 +8065,7 @@
       </p:sp>
       <p:sp>
         <p:nvSpPr>
-          <p:cNvPr id="221" name="Text 219"/>
+          <p:cNvPr id="223" name="Text 221"/>
           <p:cNvSpPr/>
           <p:nvPr/>
         </p:nvSpPr>
@@ -8040,7 +8101,7 @@
       </p:sp>
       <p:sp>
         <p:nvSpPr>
-          <p:cNvPr id="222" name="Shape 220"/>
+          <p:cNvPr id="224" name="Shape 222"/>
           <p:cNvSpPr/>
           <p:nvPr/>
         </p:nvSpPr>
@@ -8065,7 +8126,7 @@
       </p:sp>
       <p:sp>
         <p:nvSpPr>
-          <p:cNvPr id="223" name="Text 221"/>
+          <p:cNvPr id="225" name="Text 223"/>
           <p:cNvSpPr/>
           <p:nvPr/>
         </p:nvSpPr>
@@ -8101,7 +8162,7 @@
       </p:sp>
       <p:sp>
         <p:nvSpPr>
-          <p:cNvPr id="224" name="Shape 222"/>
+          <p:cNvPr id="226" name="Shape 224"/>
           <p:cNvSpPr/>
           <p:nvPr/>
         </p:nvSpPr>
@@ -8133,7 +8194,7 @@
       </p:sp>
       <p:sp>
         <p:nvSpPr>
-          <p:cNvPr id="225" name="Text 223"/>
+          <p:cNvPr id="227" name="Text 225"/>
           <p:cNvSpPr/>
           <p:nvPr/>
         </p:nvSpPr>
@@ -8169,7 +8230,7 @@
       </p:sp>
       <p:sp>
         <p:nvSpPr>
-          <p:cNvPr id="226" name="Shape 224"/>
+          <p:cNvPr id="228" name="Shape 226"/>
           <p:cNvSpPr/>
           <p:nvPr/>
         </p:nvSpPr>
@@ -8194,7 +8255,7 @@
       </p:sp>
       <p:sp>
         <p:nvSpPr>
-          <p:cNvPr id="227" name="Shape 225"/>
+          <p:cNvPr id="229" name="Shape 227"/>
           <p:cNvSpPr/>
           <p:nvPr/>
         </p:nvSpPr>
@@ -8219,7 +8280,7 @@
       </p:sp>
       <p:sp>
         <p:nvSpPr>
-          <p:cNvPr id="228" name="Text 226"/>
+          <p:cNvPr id="230" name="Text 228"/>
           <p:cNvSpPr/>
           <p:nvPr/>
         </p:nvSpPr>
@@ -8255,7 +8316,7 @@
       </p:sp>
       <p:sp>
         <p:nvSpPr>
-          <p:cNvPr id="229" name="Text 227"/>
+          <p:cNvPr id="231" name="Text 229"/>
           <p:cNvSpPr/>
           <p:nvPr/>
         </p:nvSpPr>
@@ -8291,7 +8352,7 @@
       </p:sp>
       <p:sp>
         <p:nvSpPr>
-          <p:cNvPr id="230" name="Shape 228"/>
+          <p:cNvPr id="232" name="Shape 230"/>
           <p:cNvSpPr/>
           <p:nvPr/>
         </p:nvSpPr>
@@ -8323,7 +8384,7 @@
       </p:sp>
       <p:sp>
         <p:nvSpPr>
-          <p:cNvPr id="231" name="Text 229"/>
+          <p:cNvPr id="233" name="Text 231"/>
           <p:cNvSpPr/>
           <p:nvPr/>
         </p:nvSpPr>
@@ -8359,7 +8420,7 @@
       </p:sp>
       <p:sp>
         <p:nvSpPr>
-          <p:cNvPr id="232" name="Shape 230"/>
+          <p:cNvPr id="234" name="Shape 232"/>
           <p:cNvSpPr/>
           <p:nvPr/>
         </p:nvSpPr>
@@ -8384,14 +8445,14 @@
       </p:sp>
       <p:sp>
         <p:nvSpPr>
-          <p:cNvPr id="233" name="Shape 231"/>
+          <p:cNvPr id="235" name="Shape 233"/>
           <p:cNvSpPr/>
           <p:nvPr/>
         </p:nvSpPr>
         <p:spPr>
           <a:xfrm>
             <a:off x="11009376" y="6153912"/>
-            <a:ext cx="862300" cy="73152"/>
+            <a:ext cx="866274" cy="73152"/>
           </a:xfrm>
           <a:prstGeom prst="rect">
             <a:avLst/>
@@ -8409,7 +8470,7 @@
       </p:sp>
       <p:sp>
         <p:nvSpPr>
-          <p:cNvPr id="234" name="Text 232"/>
+          <p:cNvPr id="236" name="Text 234"/>
           <p:cNvSpPr/>
           <p:nvPr/>
         </p:nvSpPr>
@@ -8437,7 +8498,7 @@
                   <a:srgbClr val="1D9E75"/>
                 </a:solidFill>
               </a:rPr>
-              <a:t>110.3h · 80 subs finalizadas</a:t>
+              <a:t>112.5h · 84 subs finalizadas</a:t>
             </a:r>
             <a:endParaRPr lang="en-US" sz="950" dirty="0"/>
           </a:p>
@@ -8445,7 +8506,7 @@
       </p:sp>
       <p:sp>
         <p:nvSpPr>
-          <p:cNvPr id="235" name="Text 233"/>
+          <p:cNvPr id="237" name="Text 235"/>
           <p:cNvSpPr/>
           <p:nvPr/>
         </p:nvSpPr>
@@ -8473,7 +8534,7 @@
                   <a:srgbClr val="888888"/>
                 </a:solidFill>
               </a:rPr>
-              <a:t>131h estimadas</a:t>
+              <a:t>133h estimadas</a:t>
             </a:r>
             <a:endParaRPr lang="en-US" sz="850" dirty="0"/>
           </a:p>

--- a/Quadro_Aulas_Report_2026-06-17.pptx
+++ b/Quadro_Aulas_Report_2026-06-17.pptx
@@ -1038,7 +1038,7 @@
                   <a:srgbClr val="8FA3C0"/>
                 </a:solidFill>
               </a:rPr>
-              <a:t>17 de Junho de 2026 as 19:51</a:t>
+              <a:t>17 de Junho de 2026 as 19:52</a:t>
             </a:r>
             <a:endParaRPr lang="en-US" sz="700" dirty="0"/>
           </a:p>
